--- a/contracts/cases/HERRERA-001/entregables/HERRERA-001_Investment_Summary.pptx
+++ b/contracts/cases/HERRERA-001/entregables/HERRERA-001_Investment_Summary.pptx
@@ -1400,7 +1400,7 @@
                 <a:ea typeface="Fraunces" pitchFamily="34" charset="-122"/>
                 <a:cs typeface="Fraunces" pitchFamily="34" charset="-120"/>
               </a:rPr>
-              <a:t>USD 784.541 – 1.091.147</a:t>
+              <a:t>USD 929.331 – 1.231.069</a:t>
             </a:r>
             <a:endParaRPr lang="en-US" sz="1600" dirty="0"/>
           </a:p>
@@ -1501,7 +1501,7 @@
                 <a:ea typeface="Fraunces" pitchFamily="34" charset="-122"/>
                 <a:cs typeface="Fraunces" pitchFamily="34" charset="-120"/>
               </a:rPr>
-              <a:t>24,6% – 34,3%</a:t>
+              <a:t>29,2% – 38,6%</a:t>
             </a:r>
             <a:endParaRPr lang="en-US" sz="1600" dirty="0"/>
           </a:p>
